--- a/SarkariYojana_Presentation.pptx
+++ b/SarkariYojana_Presentation.pptx
@@ -1617,21 +1617,14 @@
           <a:bodyPr wrap="square" lIns="0" tIns="0" rIns="0" bIns="0" rtlCol="0" anchor="ctr"/>
           <a:lstStyle/>
           <a:p>
-            <a:pPr marL="0" indent="0">
-              <a:buNone/>
-            </a:pPr>
-            <a:r>
-              <a:rPr lang="en-US" sz="2200" dirty="0">
-                <a:solidFill>
-                  <a:srgbClr val="FFFFFF"/>
-                </a:solidFill>
-                <a:latin typeface="Calibri" pitchFamily="34" charset="0"/>
-                <a:ea typeface="Calibri" pitchFamily="34" charset="-122"/>
-                <a:cs typeface="Calibri" pitchFamily="34" charset="-120"/>
-              </a:rPr>
-              <a:t>Government Scheme Chatbot</a:t>
-            </a:r>
-            <a:endParaRPr lang="en-US" sz="2200" dirty="0"/>
+            <a:r>
+              <a:rPr lang="en-US" sz="2400" dirty="0">
+                <a:solidFill>
+                  <a:schemeClr val="bg1"/>
+                </a:solidFill>
+              </a:rPr>
+              <a:t>Multilingual AI-Powered Government Scheme Assistant</a:t>
+            </a:r>
           </a:p>
         </p:txBody>
       </p:sp>
